--- a/data-eng/decks/w3d1s3.pptx
+++ b/data-eng/decks/w3d1s3.pptx
@@ -3100,7 +3100,7 @@
       <p:grpSpPr/>
       <p:sp>
         <p:nvSpPr>
-          <p:cNvPr id="2" name="Oval 1"/>
+          <p:cNvPr id="2" name="deckgen:decor"/>
           <p:cNvSpPr/>
           <p:nvPr/>
         </p:nvSpPr>
@@ -3130,7 +3130,7 @@
       </p:sp>
       <p:sp>
         <p:nvSpPr>
-          <p:cNvPr id="3" name="Oval 2"/>
+          <p:cNvPr id="3" name="deckgen:decor"/>
           <p:cNvSpPr/>
           <p:nvPr/>
         </p:nvSpPr>
@@ -3160,7 +3160,7 @@
       </p:sp>
       <p:sp>
         <p:nvSpPr>
-          <p:cNvPr id="4" name="Oval 3"/>
+          <p:cNvPr id="4" name="deckgen:decor"/>
           <p:cNvSpPr/>
           <p:nvPr/>
         </p:nvSpPr>
@@ -3190,7 +3190,7 @@
       </p:sp>
       <p:sp>
         <p:nvSpPr>
-          <p:cNvPr id="5" name="Rectangle 4"/>
+          <p:cNvPr id="5" name="deckgen:decor"/>
           <p:cNvSpPr/>
           <p:nvPr/>
         </p:nvSpPr>
@@ -3220,7 +3220,7 @@
       </p:sp>
       <p:sp>
         <p:nvSpPr>
-          <p:cNvPr id="6" name="Oval 5"/>
+          <p:cNvPr id="6" name="deckgen:decor"/>
           <p:cNvSpPr/>
           <p:nvPr/>
         </p:nvSpPr>
@@ -3250,7 +3250,7 @@
       </p:sp>
       <p:sp>
         <p:nvSpPr>
-          <p:cNvPr id="7" name="Oval 6"/>
+          <p:cNvPr id="7" name="deckgen:decor"/>
           <p:cNvSpPr/>
           <p:nvPr/>
         </p:nvSpPr>
@@ -3280,7 +3280,7 @@
       </p:sp>
       <p:sp>
         <p:nvSpPr>
-          <p:cNvPr id="8" name="Oval 7"/>
+          <p:cNvPr id="8" name="deckgen:decor"/>
           <p:cNvSpPr/>
           <p:nvPr/>
         </p:nvSpPr>
@@ -3310,7 +3310,7 @@
       </p:sp>
       <p:sp>
         <p:nvSpPr>
-          <p:cNvPr id="9" name="Oval 8"/>
+          <p:cNvPr id="9" name="deckgen:decor"/>
           <p:cNvSpPr/>
           <p:nvPr/>
         </p:nvSpPr>
@@ -3340,7 +3340,7 @@
       </p:sp>
       <p:sp>
         <p:nvSpPr>
-          <p:cNvPr id="10" name="Rectangle 9"/>
+          <p:cNvPr id="10" name="deckgen:decor"/>
           <p:cNvSpPr/>
           <p:nvPr/>
         </p:nvSpPr>
@@ -3600,7 +3600,7 @@
       <p:grpSpPr/>
       <p:sp>
         <p:nvSpPr>
-          <p:cNvPr id="2" name="Oval 1"/>
+          <p:cNvPr id="2" name="deckgen:decor"/>
           <p:cNvSpPr/>
           <p:nvPr/>
         </p:nvSpPr>
@@ -3630,7 +3630,7 @@
       </p:sp>
       <p:sp>
         <p:nvSpPr>
-          <p:cNvPr id="3" name="Oval 2"/>
+          <p:cNvPr id="3" name="deckgen:decor"/>
           <p:cNvSpPr/>
           <p:nvPr/>
         </p:nvSpPr>
@@ -3660,7 +3660,7 @@
       </p:sp>
       <p:sp>
         <p:nvSpPr>
-          <p:cNvPr id="4" name="Oval 3"/>
+          <p:cNvPr id="4" name="deckgen:decor"/>
           <p:cNvSpPr/>
           <p:nvPr/>
         </p:nvSpPr>
@@ -4379,7 +4379,7 @@
                 <a:ea typeface="Pretendard"/>
                 <a:cs typeface="Pretendard"/>
               </a:rPr>
-              <a:t>order_date 가 datetime64[ns], amount·year·month·weekday 추가</a:t>
+              <a:t>order_date 가 datetime64[us], amount·year·month·weekday 추가</a:t>
             </a:r>
           </a:p>
         </p:txBody>
@@ -4525,7 +4525,7 @@
                 <a:ea typeface="Pretendard"/>
                 <a:cs typeface="Pretendard"/>
               </a:rPr>
-              <a:t>orders_step1.parquet 를 다시 읽은 order_date 가 datetime64[ns]</a:t>
+              <a:t>orders_step1.parquet 를 다시 읽은 order_date 가 datetime64[us]</a:t>
             </a:r>
           </a:p>
         </p:txBody>
@@ -4808,7 +4808,7 @@
       <p:grpSpPr/>
       <p:sp>
         <p:nvSpPr>
-          <p:cNvPr id="2" name="Oval 1"/>
+          <p:cNvPr id="2" name="deckgen:decor"/>
           <p:cNvSpPr/>
           <p:nvPr/>
         </p:nvSpPr>
@@ -4838,7 +4838,7 @@
       </p:sp>
       <p:sp>
         <p:nvSpPr>
-          <p:cNvPr id="3" name="Oval 2"/>
+          <p:cNvPr id="3" name="deckgen:decor"/>
           <p:cNvSpPr/>
           <p:nvPr/>
         </p:nvSpPr>
@@ -5615,7 +5615,7 @@
       <p:grpSpPr/>
       <p:sp>
         <p:nvSpPr>
-          <p:cNvPr id="2" name="Oval 1"/>
+          <p:cNvPr id="2" name="deckgen:decor"/>
           <p:cNvSpPr/>
           <p:nvPr/>
         </p:nvSpPr>
@@ -5645,7 +5645,7 @@
       </p:sp>
       <p:sp>
         <p:nvSpPr>
-          <p:cNvPr id="3" name="Oval 2"/>
+          <p:cNvPr id="3" name="deckgen:decor"/>
           <p:cNvSpPr/>
           <p:nvPr/>
         </p:nvSpPr>
@@ -5675,7 +5675,7 @@
       </p:sp>
       <p:sp>
         <p:nvSpPr>
-          <p:cNvPr id="4" name="Oval 3"/>
+          <p:cNvPr id="4" name="deckgen:decor"/>
           <p:cNvSpPr/>
           <p:nvPr/>
         </p:nvSpPr>
@@ -6606,7 +6606,7 @@
       <p:grpSpPr/>
       <p:sp>
         <p:nvSpPr>
-          <p:cNvPr id="2" name="Oval 1"/>
+          <p:cNvPr id="2" name="deckgen:decor"/>
           <p:cNvSpPr/>
           <p:nvPr/>
         </p:nvSpPr>
@@ -6636,7 +6636,7 @@
       </p:sp>
       <p:sp>
         <p:nvSpPr>
-          <p:cNvPr id="3" name="Oval 2"/>
+          <p:cNvPr id="3" name="deckgen:decor"/>
           <p:cNvSpPr/>
           <p:nvPr/>
         </p:nvSpPr>
@@ -6666,7 +6666,7 @@
       </p:sp>
       <p:sp>
         <p:nvSpPr>
-          <p:cNvPr id="4" name="Oval 3"/>
+          <p:cNvPr id="4" name="deckgen:decor"/>
           <p:cNvSpPr/>
           <p:nvPr/>
         </p:nvSpPr>
@@ -6771,7 +6771,7 @@
                 <a:ea typeface="Pretendard"/>
                 <a:cs typeface="Pretendard"/>
               </a:rPr>
-              <a:t>여덟 단계 — orders.csv 에서 orders_step1.parquet 까지</a:t>
+              <a:t>여덟 단계 — orders.csv 에서 step1.parquet 까지</a:t>
             </a:r>
           </a:p>
         </p:txBody>
@@ -6842,7 +6842,7 @@
                 <a:ea typeface="Pretendard"/>
                 <a:cs typeface="Pretendard"/>
               </a:rPr>
-              <a:t>orders.csv 를 다시 읽어 시작합니다 — 1H 실습과 같은 폴더, 같은 venv</a:t>
+              <a:t>1~8단계는 transform.py 한 파일에 이어 붙인다 — 4단계부터 df 가 바뀌니 순서를 건너뛰지 않는다</a:t>
             </a:r>
           </a:p>
         </p:txBody>
@@ -7799,7 +7799,7 @@
       <p:grpSpPr/>
       <p:sp>
         <p:nvSpPr>
-          <p:cNvPr id="2" name="Oval 1"/>
+          <p:cNvPr id="2" name="deckgen:decor"/>
           <p:cNvSpPr/>
           <p:nvPr/>
         </p:nvSpPr>
@@ -7829,7 +7829,7 @@
       </p:sp>
       <p:sp>
         <p:nvSpPr>
-          <p:cNvPr id="3" name="Oval 2"/>
+          <p:cNvPr id="3" name="deckgen:decor"/>
           <p:cNvSpPr/>
           <p:nvPr/>
         </p:nvSpPr>
@@ -7859,7 +7859,7 @@
       </p:sp>
       <p:sp>
         <p:nvSpPr>
-          <p:cNvPr id="4" name="Oval 3"/>
+          <p:cNvPr id="4" name="deckgen:decor"/>
           <p:cNvSpPr/>
           <p:nvPr/>
         </p:nvSpPr>
@@ -9735,7 +9735,7 @@
       <p:grpSpPr/>
       <p:sp>
         <p:nvSpPr>
-          <p:cNvPr id="2" name="Oval 1"/>
+          <p:cNvPr id="2" name="deckgen:decor"/>
           <p:cNvSpPr/>
           <p:nvPr/>
         </p:nvSpPr>
@@ -9765,7 +9765,7 @@
       </p:sp>
       <p:sp>
         <p:nvSpPr>
-          <p:cNvPr id="3" name="Oval 2"/>
+          <p:cNvPr id="3" name="deckgen:decor"/>
           <p:cNvSpPr/>
           <p:nvPr/>
         </p:nvSpPr>
@@ -9795,7 +9795,7 @@
       </p:sp>
       <p:sp>
         <p:nvSpPr>
-          <p:cNvPr id="4" name="Oval 3"/>
+          <p:cNvPr id="4" name="deckgen:decor"/>
           <p:cNvSpPr/>
           <p:nvPr/>
         </p:nvSpPr>
@@ -10928,7 +10928,7 @@
       <p:grpSpPr/>
       <p:sp>
         <p:nvSpPr>
-          <p:cNvPr id="2" name="Oval 1"/>
+          <p:cNvPr id="2" name="deckgen:decor"/>
           <p:cNvSpPr/>
           <p:nvPr/>
         </p:nvSpPr>
@@ -10958,7 +10958,7 @@
       </p:sp>
       <p:sp>
         <p:nvSpPr>
-          <p:cNvPr id="3" name="Oval 2"/>
+          <p:cNvPr id="3" name="deckgen:decor"/>
           <p:cNvSpPr/>
           <p:nvPr/>
         </p:nvSpPr>
@@ -10988,7 +10988,7 @@
       </p:sp>
       <p:sp>
         <p:nvSpPr>
-          <p:cNvPr id="4" name="Oval 3"/>
+          <p:cNvPr id="4" name="deckgen:decor"/>
           <p:cNvSpPr/>
           <p:nvPr/>
         </p:nvSpPr>
@@ -12026,7 +12026,7 @@
       <p:grpSpPr/>
       <p:sp>
         <p:nvSpPr>
-          <p:cNvPr id="2" name="Oval 1"/>
+          <p:cNvPr id="2" name="deckgen:decor"/>
           <p:cNvSpPr/>
           <p:nvPr/>
         </p:nvSpPr>
@@ -12056,7 +12056,7 @@
       </p:sp>
       <p:sp>
         <p:nvSpPr>
-          <p:cNvPr id="3" name="Oval 2"/>
+          <p:cNvPr id="3" name="deckgen:decor"/>
           <p:cNvSpPr/>
           <p:nvPr/>
         </p:nvSpPr>
@@ -12086,7 +12086,7 @@
       </p:sp>
       <p:sp>
         <p:nvSpPr>
-          <p:cNvPr id="4" name="Oval 3"/>
+          <p:cNvPr id="4" name="deckgen:decor"/>
           <p:cNvSpPr/>
           <p:nvPr/>
         </p:nvSpPr>
@@ -12982,7 +12982,7 @@
                 <a:ea typeface="Pretendard"/>
                 <a:cs typeface="Pretendard"/>
               </a:rPr>
-              <a:t>확인 포인트: order_date 가 datetime64[ns] · amount 열 추가 · 카테고리 4가지 — 문자열인 채로는 .dt 자체를 쓸 수 없다</a:t>
+              <a:t>확인 포인트: order_date 가 datetime64[us] · amount 열 추가 · 카테고리 4가지 — 문자열인 채로는 .dt 자체를 쓸 수 없다</a:t>
             </a:r>
           </a:p>
         </p:txBody>
@@ -13119,7 +13119,7 @@
       <p:grpSpPr/>
       <p:sp>
         <p:nvSpPr>
-          <p:cNvPr id="2" name="Oval 1"/>
+          <p:cNvPr id="2" name="deckgen:decor"/>
           <p:cNvSpPr/>
           <p:nvPr/>
         </p:nvSpPr>
@@ -13149,7 +13149,7 @@
       </p:sp>
       <p:sp>
         <p:nvSpPr>
-          <p:cNvPr id="3" name="Oval 2"/>
+          <p:cNvPr id="3" name="deckgen:decor"/>
           <p:cNvSpPr/>
           <p:nvPr/>
         </p:nvSpPr>
@@ -13179,7 +13179,7 @@
       </p:sp>
       <p:sp>
         <p:nvSpPr>
-          <p:cNvPr id="4" name="Oval 3"/>
+          <p:cNvPr id="4" name="deckgen:decor"/>
           <p:cNvSpPr/>
           <p:nvPr/>
         </p:nvSpPr>
@@ -14421,7 +14421,7 @@
       <p:grpSpPr/>
       <p:sp>
         <p:nvSpPr>
-          <p:cNvPr id="2" name="Oval 1"/>
+          <p:cNvPr id="2" name="deckgen:decor"/>
           <p:cNvSpPr/>
           <p:nvPr/>
         </p:nvSpPr>
@@ -14451,7 +14451,7 @@
       </p:sp>
       <p:sp>
         <p:nvSpPr>
-          <p:cNvPr id="3" name="Oval 2"/>
+          <p:cNvPr id="3" name="deckgen:decor"/>
           <p:cNvSpPr/>
           <p:nvPr/>
         </p:nvSpPr>
@@ -14481,7 +14481,7 @@
       </p:sp>
       <p:sp>
         <p:nvSpPr>
-          <p:cNvPr id="4" name="Oval 3"/>
+          <p:cNvPr id="4" name="deckgen:decor"/>
           <p:cNvSpPr/>
           <p:nvPr/>
         </p:nvSpPr>
@@ -14803,7 +14803,7 @@
                 <a:ea typeface="Pretendard"/>
                 <a:cs typeface="Pretendard"/>
               </a:rPr>
-              <a:t>dtype → object</a:t>
+              <a:t>dtype → str (pandas 2: object)</a:t>
             </a:r>
           </a:p>
         </p:txBody>
@@ -15132,7 +15132,7 @@
                 <a:ea typeface="Pretendard"/>
                 <a:cs typeface="Pretendard"/>
               </a:rPr>
-              <a:t>dtype → datetime64[ns]</a:t>
+              <a:t>dtype → datetime64[us]</a:t>
             </a:r>
           </a:p>
         </p:txBody>

--- a/data-eng/decks/w3d1s3.pptx
+++ b/data-eng/decks/w3d1s3.pptx
@@ -14243,7 +14243,7 @@
                 <a:ea typeface="Pretendard"/>
                 <a:cs typeface="Pretendard"/>
               </a:rPr>
-              <a:t>df.isna().sum() — 결측은 price 에만 30건</a:t>
+              <a:t>df.isna().sum() — 결측은 price·amount 각 30건(amount 는 price 에서 파생)</a:t>
             </a:r>
           </a:p>
         </p:txBody>
